--- a/figures/fig_experiment_final.pptx
+++ b/figures/fig_experiment_final.pptx
@@ -3552,7 +3552,7 @@
                 <a:latin typeface="Times New Roman" panose="02020603050405020304" charset="0"/>
                 <a:cs typeface="Times New Roman" panose="02020603050405020304" charset="0"/>
               </a:rPr>
-              <a:t>(a)  Digital-twin production environment and entities</a:t>
+              <a:t>(a)  Open-workspace factory model and entities</a:t>
             </a:r>
             <a:endParaRPr lang="en-US" altLang="en-US" sz="2000" b="1">
               <a:solidFill>
@@ -5259,7 +5259,7 @@
                 <a:latin typeface="Times New Roman" panose="02020603050405020304" charset="0"/>
                 <a:cs typeface="Times New Roman" panose="02020603050405020304" charset="0"/>
               </a:rPr>
-              <a:t>Human</a:t>
+              <a:t>Worker</a:t>
             </a:r>
             <a:endParaRPr lang="en-US" altLang="en-US" sz="1500" b="1">
               <a:solidFill>
@@ -5842,7 +5842,7 @@
             <a:avLst/>
           </a:prstGeom>
           <a:solidFill>
-            <a:srgbClr val="FEEEED"/>
+            <a:srgbClr val="FFFFFF"/>
           </a:solidFill>
           <a:ln w="10160">
             <a:solidFill>
@@ -10012,7 +10012,7 @@
                 <a:latin typeface="Times New Roman" panose="02020603050405020304" charset="0"/>
                 <a:cs typeface="Times New Roman" panose="02020603050405020304" charset="0"/>
               </a:rPr>
-              <a:t>G: gantry (4)     H: human (5)     R: AGV (4)</a:t>
+              <a:t>G: gantry (4)     H: worker (5)     R: AGV (4)</a:t>
             </a:r>
             <a:endParaRPr lang="en-US" altLang="en-US" sz="1500">
               <a:solidFill>
@@ -10096,7 +10096,7 @@
                 <a:latin typeface="Times New Roman" panose="02020603050405020304" charset="0"/>
                 <a:cs typeface="Times New Roman" panose="02020603050405020304" charset="0"/>
               </a:rPr>
-              <a:t>38 nodes: 7 workstations + 4 gantries + 5 humans + 4 AGVs + 18 buffers.</a:t>
+              <a:t>38 nodes: 7 workstations + 4 gantries + 5 workers + 4 AGVs + 18 buffers.</a:t>
             </a:r>
             <a:endParaRPr lang="en-US" altLang="en-US" sz="1300">
               <a:solidFill>
@@ -10340,7 +10340,7 @@
                 <a:latin typeface="Times New Roman" panose="02020603050405020304" charset="0"/>
                 <a:cs typeface="Times New Roman" panose="02020603050405020304" charset="0"/>
               </a:rPr>
-              <a:t>Lavender: human / transport–station links.</a:t>
+              <a:t>Lavender: worker / transport–station links.</a:t>
             </a:r>
             <a:endParaRPr lang="en-US" altLang="en-US" sz="1600">
               <a:solidFill>
